--- a/class/cloud_infra_mgmt/02주차_Docker기초/01_강의자료/3차시_NamedVolume비교와영속성심화.pptx
+++ b/class/cloud_infra_mgmt/02주차_Docker기초/01_강의자료/3차시_NamedVolume비교와영속성심화.pptx
@@ -9198,7 +9198,7 @@
               </a:lnSpc>
             </a:pPr>
             <a:r>
-              <a:rPr sz="1500" b="1">
+              <a:rPr sz="1700" b="1">
                 <a:solidFill>
                   <a:srgbClr val="0D9488"/>
                 </a:solidFill>
@@ -9207,7 +9207,7 @@
               <a:t>●  </a:t>
             </a:r>
             <a:r>
-              <a:rPr sz="1500" b="0">
+              <a:rPr sz="1700" b="0">
                 <a:solidFill>
                   <a:srgbClr val="222733"/>
                 </a:solidFill>
@@ -9223,7 +9223,7 @@
               </a:lnSpc>
             </a:pPr>
             <a:r>
-              <a:rPr sz="1500" b="1">
+              <a:rPr sz="1700" b="1">
                 <a:solidFill>
                   <a:srgbClr val="0D9488"/>
                 </a:solidFill>
@@ -9232,7 +9232,7 @@
               <a:t>●  </a:t>
             </a:r>
             <a:r>
-              <a:rPr sz="1500" b="0">
+              <a:rPr sz="1700" b="0">
                 <a:solidFill>
                   <a:srgbClr val="222733"/>
                 </a:solidFill>
@@ -9248,7 +9248,7 @@
               </a:lnSpc>
             </a:pPr>
             <a:r>
-              <a:rPr sz="1500" b="1">
+              <a:rPr sz="1700" b="1">
                 <a:solidFill>
                   <a:srgbClr val="0D9488"/>
                 </a:solidFill>
@@ -9257,7 +9257,7 @@
               <a:t>●  </a:t>
             </a:r>
             <a:r>
-              <a:rPr sz="1500" b="0">
+              <a:rPr sz="1700" b="0">
                 <a:solidFill>
                   <a:srgbClr val="222733"/>
                 </a:solidFill>

--- a/class/cloud_infra_mgmt/02주차_Docker기초/01_강의자료/3차시_NamedVolume비교와영속성심화.pptx
+++ b/class/cloud_infra_mgmt/02주차_Docker기초/01_강의자료/3차시_NamedVolume비교와영속성심화.pptx
@@ -5234,7 +5234,7 @@
           <a:p>
             <a:pPr>
               <a:lnSpc>
-                <a:spcPct val="115000"/>
+                <a:spcPct val="149500"/>
               </a:lnSpc>
             </a:pPr>
             <a:r>
@@ -5259,7 +5259,7 @@
           <a:p>
             <a:pPr>
               <a:lnSpc>
-                <a:spcPct val="115000"/>
+                <a:spcPct val="149500"/>
               </a:lnSpc>
             </a:pPr>
             <a:r>
@@ -5284,7 +5284,7 @@
           <a:p>
             <a:pPr>
               <a:lnSpc>
-                <a:spcPct val="115000"/>
+                <a:spcPct val="149500"/>
               </a:lnSpc>
             </a:pPr>
             <a:r>
@@ -6792,16 +6792,104 @@
       </p:sp>
       <p:sp>
         <p:nvSpPr>
-          <p:cNvPr id="7" name="Isosceles Triangle 6"/>
+          <p:cNvPr id="7" name="Rectangle 6"/>
           <p:cNvSpPr/>
           <p:nvPr/>
         </p:nvSpPr>
         <p:spPr>
-          <a:xfrm rot="5400000">
-            <a:off x="3495751" y="1673352"/>
-            <a:ext cx="146304" cy="146304"/>
-          </a:xfrm>
-          <a:prstGeom prst="triangle">
+          <a:xfrm>
+            <a:off x="5096865" y="1730959"/>
+            <a:ext cx="1995220" cy="31089"/>
+          </a:xfrm>
+          <a:prstGeom prst="rect">
+            <a:avLst/>
+          </a:prstGeom>
+          <a:solidFill>
+            <a:srgbClr val="14B8A6"/>
+          </a:solidFill>
+          <a:ln>
+            <a:noFill/>
+          </a:ln>
+          <a:effectLst/>
+        </p:spPr>
+        <p:style>
+          <a:lnRef idx="1">
+            <a:schemeClr val="accent1"/>
+          </a:lnRef>
+          <a:fillRef idx="3">
+            <a:schemeClr val="accent1"/>
+          </a:fillRef>
+          <a:effectRef idx="2">
+            <a:schemeClr val="accent1"/>
+          </a:effectRef>
+          <a:fontRef idx="minor">
+            <a:schemeClr val="lt1"/>
+          </a:fontRef>
+        </p:style>
+        <p:txBody>
+          <a:bodyPr rtlCol="0" anchor="ctr"/>
+          <a:lstStyle/>
+          <a:p>
+            <a:pPr algn="ctr"/>
+          </a:p>
+        </p:txBody>
+      </p:sp>
+      <p:sp>
+        <p:nvSpPr>
+          <p:cNvPr id="8" name="Rectangle 7"/>
+          <p:cNvSpPr/>
+          <p:nvPr/>
+        </p:nvSpPr>
+        <p:spPr>
+          <a:xfrm>
+            <a:off x="7622438" y="1730959"/>
+            <a:ext cx="1995220" cy="31089"/>
+          </a:xfrm>
+          <a:prstGeom prst="rect">
+            <a:avLst/>
+          </a:prstGeom>
+          <a:solidFill>
+            <a:srgbClr val="14B8A6"/>
+          </a:solidFill>
+          <a:ln>
+            <a:noFill/>
+          </a:ln>
+          <a:effectLst/>
+        </p:spPr>
+        <p:style>
+          <a:lnRef idx="1">
+            <a:schemeClr val="accent1"/>
+          </a:lnRef>
+          <a:fillRef idx="3">
+            <a:schemeClr val="accent1"/>
+          </a:fillRef>
+          <a:effectRef idx="2">
+            <a:schemeClr val="accent1"/>
+          </a:effectRef>
+          <a:fontRef idx="minor">
+            <a:schemeClr val="lt1"/>
+          </a:fontRef>
+        </p:style>
+        <p:txBody>
+          <a:bodyPr rtlCol="0" anchor="ctr"/>
+          <a:lstStyle/>
+          <a:p>
+            <a:pPr algn="ctr"/>
+          </a:p>
+        </p:txBody>
+      </p:sp>
+      <p:sp>
+        <p:nvSpPr>
+          <p:cNvPr id="9" name="Oval 8"/>
+          <p:cNvSpPr/>
+          <p:nvPr/>
+        </p:nvSpPr>
+        <p:spPr>
+          <a:xfrm>
+            <a:off x="2040940" y="1481328"/>
+            <a:ext cx="530352" cy="530352"/>
+          </a:xfrm>
+          <a:prstGeom prst="ellipse">
             <a:avLst/>
           </a:prstGeom>
           <a:solidFill>
@@ -6836,227 +6924,7 @@
       </p:sp>
       <p:sp>
         <p:nvSpPr>
-          <p:cNvPr id="8" name="Rectangle 7"/>
-          <p:cNvSpPr/>
-          <p:nvPr/>
-        </p:nvSpPr>
-        <p:spPr>
-          <a:xfrm>
-            <a:off x="5096865" y="1730959"/>
-            <a:ext cx="1995220" cy="31089"/>
-          </a:xfrm>
-          <a:prstGeom prst="rect">
-            <a:avLst/>
-          </a:prstGeom>
-          <a:solidFill>
-            <a:srgbClr val="14B8A6"/>
-          </a:solidFill>
-          <a:ln>
-            <a:noFill/>
-          </a:ln>
-          <a:effectLst/>
-        </p:spPr>
-        <p:style>
-          <a:lnRef idx="1">
-            <a:schemeClr val="accent1"/>
-          </a:lnRef>
-          <a:fillRef idx="3">
-            <a:schemeClr val="accent1"/>
-          </a:fillRef>
-          <a:effectRef idx="2">
-            <a:schemeClr val="accent1"/>
-          </a:effectRef>
-          <a:fontRef idx="minor">
-            <a:schemeClr val="lt1"/>
-          </a:fontRef>
-        </p:style>
-        <p:txBody>
-          <a:bodyPr rtlCol="0" anchor="ctr"/>
-          <a:lstStyle/>
-          <a:p>
-            <a:pPr algn="ctr"/>
-          </a:p>
-        </p:txBody>
-      </p:sp>
-      <p:sp>
-        <p:nvSpPr>
-          <p:cNvPr id="9" name="Isosceles Triangle 8"/>
-          <p:cNvSpPr/>
-          <p:nvPr/>
-        </p:nvSpPr>
-        <p:spPr>
-          <a:xfrm rot="5400000">
-            <a:off x="6021324" y="1673352"/>
-            <a:ext cx="146304" cy="146304"/>
-          </a:xfrm>
-          <a:prstGeom prst="triangle">
-            <a:avLst/>
-          </a:prstGeom>
-          <a:solidFill>
-            <a:srgbClr val="0D9488"/>
-          </a:solidFill>
-          <a:ln>
-            <a:noFill/>
-          </a:ln>
-          <a:effectLst/>
-        </p:spPr>
-        <p:style>
-          <a:lnRef idx="1">
-            <a:schemeClr val="accent1"/>
-          </a:lnRef>
-          <a:fillRef idx="3">
-            <a:schemeClr val="accent1"/>
-          </a:fillRef>
-          <a:effectRef idx="2">
-            <a:schemeClr val="accent1"/>
-          </a:effectRef>
-          <a:fontRef idx="minor">
-            <a:schemeClr val="lt1"/>
-          </a:fontRef>
-        </p:style>
-        <p:txBody>
-          <a:bodyPr rtlCol="0" anchor="ctr"/>
-          <a:lstStyle/>
-          <a:p>
-            <a:pPr algn="ctr"/>
-          </a:p>
-        </p:txBody>
-      </p:sp>
-      <p:sp>
-        <p:nvSpPr>
-          <p:cNvPr id="10" name="Rectangle 9"/>
-          <p:cNvSpPr/>
-          <p:nvPr/>
-        </p:nvSpPr>
-        <p:spPr>
-          <a:xfrm>
-            <a:off x="7622438" y="1730959"/>
-            <a:ext cx="1995220" cy="31089"/>
-          </a:xfrm>
-          <a:prstGeom prst="rect">
-            <a:avLst/>
-          </a:prstGeom>
-          <a:solidFill>
-            <a:srgbClr val="14B8A6"/>
-          </a:solidFill>
-          <a:ln>
-            <a:noFill/>
-          </a:ln>
-          <a:effectLst/>
-        </p:spPr>
-        <p:style>
-          <a:lnRef idx="1">
-            <a:schemeClr val="accent1"/>
-          </a:lnRef>
-          <a:fillRef idx="3">
-            <a:schemeClr val="accent1"/>
-          </a:fillRef>
-          <a:effectRef idx="2">
-            <a:schemeClr val="accent1"/>
-          </a:effectRef>
-          <a:fontRef idx="minor">
-            <a:schemeClr val="lt1"/>
-          </a:fontRef>
-        </p:style>
-        <p:txBody>
-          <a:bodyPr rtlCol="0" anchor="ctr"/>
-          <a:lstStyle/>
-          <a:p>
-            <a:pPr algn="ctr"/>
-          </a:p>
-        </p:txBody>
-      </p:sp>
-      <p:sp>
-        <p:nvSpPr>
-          <p:cNvPr id="11" name="Isosceles Triangle 10"/>
-          <p:cNvSpPr/>
-          <p:nvPr/>
-        </p:nvSpPr>
-        <p:spPr>
-          <a:xfrm rot="5400000">
-            <a:off x="8546896" y="1673352"/>
-            <a:ext cx="146304" cy="146304"/>
-          </a:xfrm>
-          <a:prstGeom prst="triangle">
-            <a:avLst/>
-          </a:prstGeom>
-          <a:solidFill>
-            <a:srgbClr val="0D9488"/>
-          </a:solidFill>
-          <a:ln>
-            <a:noFill/>
-          </a:ln>
-          <a:effectLst/>
-        </p:spPr>
-        <p:style>
-          <a:lnRef idx="1">
-            <a:schemeClr val="accent1"/>
-          </a:lnRef>
-          <a:fillRef idx="3">
-            <a:schemeClr val="accent1"/>
-          </a:fillRef>
-          <a:effectRef idx="2">
-            <a:schemeClr val="accent1"/>
-          </a:effectRef>
-          <a:fontRef idx="minor">
-            <a:schemeClr val="lt1"/>
-          </a:fontRef>
-        </p:style>
-        <p:txBody>
-          <a:bodyPr rtlCol="0" anchor="ctr"/>
-          <a:lstStyle/>
-          <a:p>
-            <a:pPr algn="ctr"/>
-          </a:p>
-        </p:txBody>
-      </p:sp>
-      <p:sp>
-        <p:nvSpPr>
-          <p:cNvPr id="12" name="Oval 11"/>
-          <p:cNvSpPr/>
-          <p:nvPr/>
-        </p:nvSpPr>
-        <p:spPr>
-          <a:xfrm>
-            <a:off x="2040940" y="1481328"/>
-            <a:ext cx="530352" cy="530352"/>
-          </a:xfrm>
-          <a:prstGeom prst="ellipse">
-            <a:avLst/>
-          </a:prstGeom>
-          <a:solidFill>
-            <a:srgbClr val="0D9488"/>
-          </a:solidFill>
-          <a:ln>
-            <a:noFill/>
-          </a:ln>
-          <a:effectLst/>
-        </p:spPr>
-        <p:style>
-          <a:lnRef idx="1">
-            <a:schemeClr val="accent1"/>
-          </a:lnRef>
-          <a:fillRef idx="3">
-            <a:schemeClr val="accent1"/>
-          </a:fillRef>
-          <a:effectRef idx="2">
-            <a:schemeClr val="accent1"/>
-          </a:effectRef>
-          <a:fontRef idx="minor">
-            <a:schemeClr val="lt1"/>
-          </a:fontRef>
-        </p:style>
-        <p:txBody>
-          <a:bodyPr rtlCol="0" anchor="ctr"/>
-          <a:lstStyle/>
-          <a:p>
-            <a:pPr algn="ctr"/>
-          </a:p>
-        </p:txBody>
-      </p:sp>
-      <p:sp>
-        <p:nvSpPr>
-          <p:cNvPr id="13" name="TextBox 12"/>
+          <p:cNvPr id="10" name="TextBox 9"/>
           <p:cNvSpPr txBox="1"/>
           <p:nvPr/>
         </p:nvSpPr>
@@ -7091,7 +6959,7 @@
       </p:sp>
       <p:sp>
         <p:nvSpPr>
-          <p:cNvPr id="14" name="Rounded Rectangle 13"/>
+          <p:cNvPr id="11" name="Rounded Rectangle 10"/>
           <p:cNvSpPr/>
           <p:nvPr/>
         </p:nvSpPr>
@@ -7139,7 +7007,7 @@
       </p:sp>
       <p:sp>
         <p:nvSpPr>
-          <p:cNvPr id="15" name="TextBox 14"/>
+          <p:cNvPr id="12" name="TextBox 11"/>
           <p:cNvSpPr txBox="1"/>
           <p:nvPr/>
         </p:nvSpPr>
@@ -7174,7 +7042,7 @@
       </p:sp>
       <p:sp>
         <p:nvSpPr>
-          <p:cNvPr id="16" name="TextBox 15"/>
+          <p:cNvPr id="13" name="TextBox 12"/>
           <p:cNvSpPr txBox="1"/>
           <p:nvPr/>
         </p:nvSpPr>
@@ -7213,7 +7081,7 @@
       </p:sp>
       <p:sp>
         <p:nvSpPr>
-          <p:cNvPr id="17" name="Oval 16"/>
+          <p:cNvPr id="14" name="Oval 13"/>
           <p:cNvSpPr/>
           <p:nvPr/>
         </p:nvSpPr>
@@ -7257,7 +7125,7 @@
       </p:sp>
       <p:sp>
         <p:nvSpPr>
-          <p:cNvPr id="18" name="TextBox 17"/>
+          <p:cNvPr id="15" name="TextBox 14"/>
           <p:cNvSpPr txBox="1"/>
           <p:nvPr/>
         </p:nvSpPr>
@@ -7292,7 +7160,7 @@
       </p:sp>
       <p:sp>
         <p:nvSpPr>
-          <p:cNvPr id="19" name="Rounded Rectangle 18"/>
+          <p:cNvPr id="16" name="Rounded Rectangle 15"/>
           <p:cNvSpPr/>
           <p:nvPr/>
         </p:nvSpPr>
@@ -7340,7 +7208,7 @@
       </p:sp>
       <p:sp>
         <p:nvSpPr>
-          <p:cNvPr id="20" name="TextBox 19"/>
+          <p:cNvPr id="17" name="TextBox 16"/>
           <p:cNvSpPr txBox="1"/>
           <p:nvPr/>
         </p:nvSpPr>
@@ -7375,7 +7243,7 @@
       </p:sp>
       <p:sp>
         <p:nvSpPr>
-          <p:cNvPr id="21" name="TextBox 20"/>
+          <p:cNvPr id="18" name="TextBox 17"/>
           <p:cNvSpPr txBox="1"/>
           <p:nvPr/>
         </p:nvSpPr>
@@ -7414,7 +7282,7 @@
       </p:sp>
       <p:sp>
         <p:nvSpPr>
-          <p:cNvPr id="22" name="Oval 21"/>
+          <p:cNvPr id="19" name="Oval 18"/>
           <p:cNvSpPr/>
           <p:nvPr/>
         </p:nvSpPr>
@@ -7458,7 +7326,7 @@
       </p:sp>
       <p:sp>
         <p:nvSpPr>
-          <p:cNvPr id="23" name="TextBox 22"/>
+          <p:cNvPr id="20" name="TextBox 19"/>
           <p:cNvSpPr txBox="1"/>
           <p:nvPr/>
         </p:nvSpPr>
@@ -7493,7 +7361,7 @@
       </p:sp>
       <p:sp>
         <p:nvSpPr>
-          <p:cNvPr id="24" name="Rounded Rectangle 23"/>
+          <p:cNvPr id="21" name="Rounded Rectangle 20"/>
           <p:cNvSpPr/>
           <p:nvPr/>
         </p:nvSpPr>
@@ -7541,7 +7409,7 @@
       </p:sp>
       <p:sp>
         <p:nvSpPr>
-          <p:cNvPr id="25" name="TextBox 24"/>
+          <p:cNvPr id="22" name="TextBox 21"/>
           <p:cNvSpPr txBox="1"/>
           <p:nvPr/>
         </p:nvSpPr>
@@ -7576,7 +7444,7 @@
       </p:sp>
       <p:sp>
         <p:nvSpPr>
-          <p:cNvPr id="26" name="TextBox 25"/>
+          <p:cNvPr id="23" name="TextBox 22"/>
           <p:cNvSpPr txBox="1"/>
           <p:nvPr/>
         </p:nvSpPr>
@@ -7615,7 +7483,7 @@
       </p:sp>
       <p:sp>
         <p:nvSpPr>
-          <p:cNvPr id="27" name="Oval 26"/>
+          <p:cNvPr id="24" name="Oval 23"/>
           <p:cNvSpPr/>
           <p:nvPr/>
         </p:nvSpPr>
@@ -7659,7 +7527,7 @@
       </p:sp>
       <p:sp>
         <p:nvSpPr>
-          <p:cNvPr id="28" name="TextBox 27"/>
+          <p:cNvPr id="25" name="TextBox 24"/>
           <p:cNvSpPr txBox="1"/>
           <p:nvPr/>
         </p:nvSpPr>
@@ -7694,7 +7562,7 @@
       </p:sp>
       <p:sp>
         <p:nvSpPr>
-          <p:cNvPr id="29" name="Rounded Rectangle 28"/>
+          <p:cNvPr id="26" name="Rounded Rectangle 25"/>
           <p:cNvSpPr/>
           <p:nvPr/>
         </p:nvSpPr>
@@ -7742,7 +7610,7 @@
       </p:sp>
       <p:sp>
         <p:nvSpPr>
-          <p:cNvPr id="30" name="TextBox 29"/>
+          <p:cNvPr id="27" name="TextBox 26"/>
           <p:cNvSpPr txBox="1"/>
           <p:nvPr/>
         </p:nvSpPr>
@@ -7777,7 +7645,7 @@
       </p:sp>
       <p:sp>
         <p:nvSpPr>
-          <p:cNvPr id="31" name="TextBox 30"/>
+          <p:cNvPr id="28" name="TextBox 27"/>
           <p:cNvSpPr txBox="1"/>
           <p:nvPr/>
         </p:nvSpPr>
@@ -7816,7 +7684,7 @@
       </p:sp>
       <p:sp>
         <p:nvSpPr>
-          <p:cNvPr id="32" name="TextBox 31"/>
+          <p:cNvPr id="29" name="TextBox 28"/>
           <p:cNvSpPr txBox="1"/>
           <p:nvPr/>
         </p:nvSpPr>
@@ -7851,7 +7719,7 @@
       </p:sp>
       <p:sp>
         <p:nvSpPr>
-          <p:cNvPr id="33" name="TextBox 32"/>
+          <p:cNvPr id="30" name="TextBox 29"/>
           <p:cNvSpPr txBox="1"/>
           <p:nvPr/>
         </p:nvSpPr>
@@ -7886,7 +7754,7 @@
       </p:sp>
       <p:sp>
         <p:nvSpPr>
-          <p:cNvPr id="34" name="Rectangle 33"/>
+          <p:cNvPr id="31" name="Rectangle 30"/>
           <p:cNvSpPr/>
           <p:nvPr/>
         </p:nvSpPr>
@@ -8410,7 +8278,7 @@
           <a:p>
             <a:pPr>
               <a:lnSpc>
-                <a:spcPct val="115000"/>
+                <a:spcPct val="149500"/>
               </a:lnSpc>
             </a:pPr>
             <a:r>
@@ -8435,7 +8303,7 @@
           <a:p>
             <a:pPr>
               <a:lnSpc>
-                <a:spcPct val="115000"/>
+                <a:spcPct val="149500"/>
               </a:lnSpc>
             </a:pPr>
             <a:r>
@@ -8460,7 +8328,7 @@
           <a:p>
             <a:pPr>
               <a:lnSpc>
-                <a:spcPct val="115000"/>
+                <a:spcPct val="149500"/>
               </a:lnSpc>
             </a:pPr>
             <a:r>
@@ -9194,7 +9062,7 @@
           <a:p>
             <a:pPr>
               <a:lnSpc>
-                <a:spcPct val="115000"/>
+                <a:spcPct val="149500"/>
               </a:lnSpc>
             </a:pPr>
             <a:r>
@@ -9219,7 +9087,7 @@
           <a:p>
             <a:pPr>
               <a:lnSpc>
-                <a:spcPct val="115000"/>
+                <a:spcPct val="149500"/>
               </a:lnSpc>
             </a:pPr>
             <a:r>
@@ -9244,7 +9112,7 @@
           <a:p>
             <a:pPr>
               <a:lnSpc>
-                <a:spcPct val="115000"/>
+                <a:spcPct val="149500"/>
               </a:lnSpc>
             </a:pPr>
             <a:r>
@@ -11435,7 +11303,7 @@
           <a:p>
             <a:pPr>
               <a:lnSpc>
-                <a:spcPct val="115000"/>
+                <a:spcPct val="149500"/>
               </a:lnSpc>
             </a:pPr>
             <a:r>
@@ -11460,7 +11328,7 @@
           <a:p>
             <a:pPr>
               <a:lnSpc>
-                <a:spcPct val="115000"/>
+                <a:spcPct val="149500"/>
               </a:lnSpc>
             </a:pPr>
             <a:r>
@@ -11485,7 +11353,7 @@
           <a:p>
             <a:pPr>
               <a:lnSpc>
-                <a:spcPct val="115000"/>
+                <a:spcPct val="149500"/>
               </a:lnSpc>
             </a:pPr>
             <a:r>
@@ -11510,7 +11378,7 @@
           <a:p>
             <a:pPr>
               <a:lnSpc>
-                <a:spcPct val="115000"/>
+                <a:spcPct val="149500"/>
               </a:lnSpc>
             </a:pPr>
             <a:r>

--- a/class/cloud_infra_mgmt/02주차_Docker기초/01_강의자료/3차시_NamedVolume비교와영속성심화.pptx
+++ b/class/cloud_infra_mgmt/02주차_Docker기초/01_강의자료/3차시_NamedVolume비교와영속성심화.pptx
@@ -4858,6 +4858,8 @@
                   <a:srgbClr val="14B8A6"/>
                 </a:solidFill>
                 <a:latin typeface="맑은 고딕"/>
+                <a:ea typeface="맑은 고딕"/>
+                <a:cs typeface="맑은 고딕"/>
               </a:rPr>
               <a:t>클라우드인프라관리  ·  2주차 3차시</a:t>
             </a:r>
@@ -4893,6 +4895,8 @@
                   <a:srgbClr val="FFFFFF"/>
                 </a:solidFill>
                 <a:latin typeface="맑은 고딕"/>
+                <a:ea typeface="맑은 고딕"/>
+                <a:cs typeface="맑은 고딕"/>
               </a:rPr>
               <a:t>데이터 영속성 심화 —</a:t>
             </a:r>
@@ -4905,6 +4909,8 @@
                   <a:srgbClr val="FFFFFF"/>
                 </a:solidFill>
                 <a:latin typeface="맑은 고딕"/>
+                <a:ea typeface="맑은 고딕"/>
+                <a:cs typeface="맑은 고딕"/>
               </a:rPr>
               <a:t>Named Volume vs Bind Mount</a:t>
             </a:r>
@@ -4940,6 +4946,8 @@
                   <a:srgbClr val="C9D3E6"/>
                 </a:solidFill>
                 <a:latin typeface="맑은 고딕"/>
+                <a:ea typeface="맑은 고딕"/>
+                <a:cs typeface="맑은 고딕"/>
               </a:rPr>
               <a:t>실시간 반영 확인 · 두 방식 비교</a:t>
             </a:r>
@@ -4975,6 +4983,8 @@
                   <a:srgbClr val="FFFFFF"/>
                 </a:solidFill>
                 <a:latin typeface="맑은 고딕"/>
+                <a:ea typeface="맑은 고딕"/>
+                <a:cs typeface="맑은 고딕"/>
               </a:rPr>
               <a:t>영남이공대학교 김지윤교수</a:t>
             </a:r>
@@ -5134,6 +5144,8 @@
                   <a:srgbClr val="14213D"/>
                 </a:solidFill>
                 <a:latin typeface="맑은 고딕"/>
+                <a:ea typeface="맑은 고딕"/>
+                <a:cs typeface="맑은 고딕"/>
               </a:rPr>
               <a:t>03</a:t>
             </a:r>
@@ -5169,6 +5181,8 @@
                   <a:srgbClr val="14B8A6"/>
                 </a:solidFill>
                 <a:latin typeface="맑은 고딕"/>
+                <a:ea typeface="맑은 고딕"/>
+                <a:cs typeface="맑은 고딕"/>
               </a:rPr>
               <a:t>실습 안내</a:t>
             </a:r>
@@ -5204,6 +5218,8 @@
                   <a:srgbClr val="FFFFFF"/>
                 </a:solidFill>
                 <a:latin typeface="맑은 고딕"/>
+                <a:ea typeface="맑은 고딕"/>
+                <a:cs typeface="맑은 고딕"/>
               </a:rPr>
               <a:t>VM 과제 제출</a:t>
             </a:r>
@@ -5243,6 +5259,8 @@
                   <a:srgbClr val="0D9488"/>
                 </a:solidFill>
                 <a:latin typeface="맑은 고딕"/>
+                <a:ea typeface="맑은 고딕"/>
+                <a:cs typeface="맑은 고딕"/>
               </a:rPr>
               <a:t>●  </a:t>
             </a:r>
@@ -5252,6 +5270,8 @@
                   <a:srgbClr val="222733"/>
                 </a:solidFill>
                 <a:latin typeface="맑은 고딕"/>
+                <a:ea typeface="맑은 고딕"/>
+                <a:cs typeface="맑은 고딕"/>
               </a:rPr>
               <a:t>VM에서 webvol의 index.html을 수정하고 즉시 반영되는지 캡처</a:t>
             </a:r>
@@ -5268,6 +5288,8 @@
                   <a:srgbClr val="0D9488"/>
                 </a:solidFill>
                 <a:latin typeface="맑은 고딕"/>
+                <a:ea typeface="맑은 고딕"/>
+                <a:cs typeface="맑은 고딕"/>
               </a:rPr>
               <a:t>●  </a:t>
             </a:r>
@@ -5277,6 +5299,8 @@
                   <a:srgbClr val="222733"/>
                 </a:solidFill>
                 <a:latin typeface="맑은 고딕"/>
+                <a:ea typeface="맑은 고딕"/>
+                <a:cs typeface="맑은 고딕"/>
               </a:rPr>
               <a:t>docker volume create + Named Volume 컨테이너 실행 결과 캡처</a:t>
             </a:r>
@@ -5293,6 +5317,8 @@
                   <a:srgbClr val="0D9488"/>
                 </a:solidFill>
                 <a:latin typeface="맑은 고딕"/>
+                <a:ea typeface="맑은 고딕"/>
+                <a:cs typeface="맑은 고딕"/>
               </a:rPr>
               <a:t>●  </a:t>
             </a:r>
@@ -5302,6 +5328,8 @@
                   <a:srgbClr val="222733"/>
                 </a:solidFill>
                 <a:latin typeface="맑은 고딕"/>
+                <a:ea typeface="맑은 고딕"/>
+                <a:cs typeface="맑은 고딕"/>
               </a:rPr>
               <a:t>2주차 전체 과제(1~3차시)를 정리해서 LMS 과제 게시판에 제출</a:t>
             </a:r>
@@ -5337,6 +5365,8 @@
                   <a:srgbClr val="5B6373"/>
                 </a:solidFill>
                 <a:latin typeface="맑은 고딕"/>
+                <a:ea typeface="맑은 고딕"/>
+                <a:cs typeface="맑은 고딕"/>
               </a:rPr>
               <a:t>클라우드인프라관리  ·  2주차 3차시</a:t>
             </a:r>
@@ -5372,6 +5402,8 @@
                   <a:srgbClr val="5B6373"/>
                 </a:solidFill>
                 <a:latin typeface="맑은 고딕"/>
+                <a:ea typeface="맑은 고딕"/>
+                <a:cs typeface="맑은 고딕"/>
               </a:rPr>
               <a:t>10 / 12</a:t>
             </a:r>
@@ -5557,6 +5589,8 @@
                   <a:srgbClr val="FFFFFF"/>
                 </a:solidFill>
                 <a:latin typeface="맑은 고딕"/>
+                <a:ea typeface="맑은 고딕"/>
+                <a:cs typeface="맑은 고딕"/>
               </a:rPr>
               <a:t>오늘의 정리</a:t>
             </a:r>
@@ -5610,6 +5644,8 @@
                   <a:srgbClr val="14213D"/>
                 </a:solidFill>
                 <a:latin typeface="맑은 고딕"/>
+                <a:ea typeface="맑은 고딕"/>
+                <a:cs typeface="맑은 고딕"/>
               </a:rPr>
               <a:t>1</a:t>
             </a:r>
@@ -5645,6 +5681,8 @@
                   <a:srgbClr val="FFFFFF"/>
                 </a:solidFill>
                 <a:latin typeface="맑은 고딕"/>
+                <a:ea typeface="맑은 고딕"/>
+                <a:cs typeface="맑은 고딕"/>
               </a:rPr>
               <a:t>Bind Mount는 파일을 '복사'가 아니라 '연결'해서 실시간 반영된다</a:t>
             </a:r>
@@ -5698,6 +5736,8 @@
                   <a:srgbClr val="14213D"/>
                 </a:solidFill>
                 <a:latin typeface="맑은 고딕"/>
+                <a:ea typeface="맑은 고딕"/>
+                <a:cs typeface="맑은 고딕"/>
               </a:rPr>
               <a:t>2</a:t>
             </a:r>
@@ -5733,6 +5773,8 @@
                   <a:srgbClr val="FFFFFF"/>
                 </a:solidFill>
                 <a:latin typeface="맑은 고딕"/>
+                <a:ea typeface="맑은 고딕"/>
+                <a:cs typeface="맑은 고딕"/>
               </a:rPr>
               <a:t>Bind Mount = 내가 경로 관리 / Named Volume = Docker가 관리</a:t>
             </a:r>
@@ -5874,6 +5916,8 @@
                   <a:srgbClr val="FFFFFF"/>
                 </a:solidFill>
                 <a:latin typeface="맑은 고딕"/>
+                <a:ea typeface="맑은 고딕"/>
+                <a:cs typeface="맑은 고딕"/>
               </a:rPr>
               <a:t>다음 주 예고</a:t>
             </a:r>
@@ -5909,6 +5953,8 @@
                   <a:srgbClr val="14B8A6"/>
                 </a:solidFill>
                 <a:latin typeface="맑은 고딕"/>
+                <a:ea typeface="맑은 고딕"/>
+                <a:cs typeface="맑은 고딕"/>
               </a:rPr>
               <a:t>다음 차시 예고 — 3주차 — Dockerfile 기반 이미지 빌드 및 Docker Hub 배포</a:t>
             </a:r>
@@ -5944,6 +5990,8 @@
                   <a:srgbClr val="FFFFFF"/>
                 </a:solidFill>
                 <a:latin typeface="맑은 고딕"/>
+                <a:ea typeface="맑은 고딕"/>
+                <a:cs typeface="맑은 고딕"/>
               </a:rPr>
               <a:t>지금까지는 이미 만들어진 이미지(nginx)만 썼습니다. 다음 주엔 Dockerfile로 나만의 이미지를 직접 만들고 Docker Hub에 올려봅니다. 이때 GitHub·Docker Hub 계정이 필요하니, 미리 가입해두면 좋습니다(가입 안내는 3주차 1차시에 다시 드립니다).</a:t>
             </a:r>
@@ -6129,6 +6177,8 @@
                   <a:srgbClr val="14B8A6"/>
                 </a:solidFill>
                 <a:latin typeface="맑은 고딕"/>
+                <a:ea typeface="맑은 고딕"/>
+                <a:cs typeface="맑은 고딕"/>
               </a:rPr>
               <a:t>2주차를 마치며</a:t>
             </a:r>
@@ -6164,6 +6214,8 @@
                   <a:srgbClr val="FFFFFF"/>
                 </a:solidFill>
                 <a:latin typeface="맑은 고딕"/>
+                <a:ea typeface="맑은 고딕"/>
+                <a:cs typeface="맑은 고딕"/>
               </a:rPr>
               <a:t>수고하셨습니다!</a:t>
             </a:r>
@@ -6203,6 +6255,8 @@
                   <a:srgbClr val="C9D3E6"/>
                 </a:solidFill>
                 <a:latin typeface="맑은 고딕"/>
+                <a:ea typeface="맑은 고딕"/>
+                <a:cs typeface="맑은 고딕"/>
               </a:rPr>
               <a:t>컨테이너 명령어와 데이터 영속성(Bind Mount·Named Volume)까지, 실전에서 꼭 필요한 감각을 다지셨습니다.</a:t>
             </a:r>
@@ -6344,6 +6398,8 @@
                   <a:srgbClr val="14B8A6"/>
                 </a:solidFill>
                 <a:latin typeface="맑은 고딕"/>
+                <a:ea typeface="맑은 고딕"/>
+                <a:cs typeface="맑은 고딕"/>
               </a:rPr>
               <a:t>SESSION OVERVIEW</a:t>
             </a:r>
@@ -6379,6 +6435,8 @@
                   <a:srgbClr val="FFFFFF"/>
                 </a:solidFill>
                 <a:latin typeface="맑은 고딕"/>
+                <a:ea typeface="맑은 고딕"/>
+                <a:cs typeface="맑은 고딕"/>
               </a:rPr>
               <a:t>오늘의 학습 목표</a:t>
             </a:r>
@@ -6418,6 +6476,8 @@
                   <a:srgbClr val="222733"/>
                 </a:solidFill>
                 <a:latin typeface="맑은 고딕"/>
+                <a:ea typeface="맑은 고딕"/>
+                <a:cs typeface="맑은 고딕"/>
               </a:rPr>
               <a:t>1.  Bind Mount의 실시간 반영을 직접 눈으로 확인한다</a:t>
             </a:r>
@@ -6434,6 +6494,8 @@
                   <a:srgbClr val="222733"/>
                 </a:solidFill>
                 <a:latin typeface="맑은 고딕"/>
+                <a:ea typeface="맑은 고딕"/>
+                <a:cs typeface="맑은 고딕"/>
               </a:rPr>
               <a:t>2.  Named Volume 개념을 이해한다</a:t>
             </a:r>
@@ -6450,6 +6512,8 @@
                   <a:srgbClr val="222733"/>
                 </a:solidFill>
                 <a:latin typeface="맑은 고딕"/>
+                <a:ea typeface="맑은 고딕"/>
+                <a:cs typeface="맑은 고딕"/>
               </a:rPr>
               <a:t>3.  Bind Mount와 Named Volume을 상황에 맞게 구분해서 쓸 수 있다</a:t>
             </a:r>
@@ -6485,6 +6549,8 @@
                   <a:srgbClr val="5B6373"/>
                 </a:solidFill>
                 <a:latin typeface="맑은 고딕"/>
+                <a:ea typeface="맑은 고딕"/>
+                <a:cs typeface="맑은 고딕"/>
               </a:rPr>
               <a:t>클라우드인프라관리  ·  2주차 3차시</a:t>
             </a:r>
@@ -6520,6 +6586,8 @@
                   <a:srgbClr val="5B6373"/>
                 </a:solidFill>
                 <a:latin typeface="맑은 고딕"/>
+                <a:ea typeface="맑은 고딕"/>
+                <a:cs typeface="맑은 고딕"/>
               </a:rPr>
               <a:t>02 / 12</a:t>
             </a:r>
@@ -6705,6 +6773,8 @@
                   <a:srgbClr val="14B8A6"/>
                 </a:solidFill>
                 <a:latin typeface="맑은 고딕"/>
+                <a:ea typeface="맑은 고딕"/>
+                <a:cs typeface="맑은 고딕"/>
               </a:rPr>
               <a:t>SESSION OVERVIEW</a:t>
             </a:r>
@@ -6740,6 +6810,8 @@
                   <a:srgbClr val="FFFFFF"/>
                 </a:solidFill>
                 <a:latin typeface="맑은 고딕"/>
+                <a:ea typeface="맑은 고딕"/>
+                <a:cs typeface="맑은 고딕"/>
               </a:rPr>
               <a:t>오늘의 진행 순서</a:t>
             </a:r>
@@ -6951,6 +7023,8 @@
                   <a:srgbClr val="FFFFFF"/>
                 </a:solidFill>
                 <a:latin typeface="맑은 고딕"/>
+                <a:ea typeface="맑은 고딕"/>
+                <a:cs typeface="맑은 고딕"/>
               </a:rPr>
               <a:t>1</a:t>
             </a:r>
@@ -7034,6 +7108,8 @@
                   <a:srgbClr val="14213D"/>
                 </a:solidFill>
                 <a:latin typeface="맑은 고딕"/>
+                <a:ea typeface="맑은 고딕"/>
+                <a:cs typeface="맑은 고딕"/>
               </a:rPr>
               <a:t>개념 설명</a:t>
             </a:r>
@@ -7073,6 +7149,8 @@
                   <a:srgbClr val="222733"/>
                 </a:solidFill>
                 <a:latin typeface="맑은 고딕"/>
+                <a:ea typeface="맑은 고딕"/>
+                <a:cs typeface="맑은 고딕"/>
               </a:rPr>
               <a:t>강의자료 기반 직접 강의</a:t>
             </a:r>
@@ -7152,6 +7230,8 @@
                   <a:srgbClr val="FFFFFF"/>
                 </a:solidFill>
                 <a:latin typeface="맑은 고딕"/>
+                <a:ea typeface="맑은 고딕"/>
+                <a:cs typeface="맑은 고딕"/>
               </a:rPr>
               <a:t>2</a:t>
             </a:r>
@@ -7235,6 +7315,8 @@
                   <a:srgbClr val="14213D"/>
                 </a:solidFill>
                 <a:latin typeface="맑은 고딕"/>
+                <a:ea typeface="맑은 고딕"/>
+                <a:cs typeface="맑은 고딕"/>
               </a:rPr>
               <a:t>Killercoda</a:t>
             </a:r>
@@ -7274,6 +7356,8 @@
                   <a:srgbClr val="222733"/>
                 </a:solidFill>
                 <a:latin typeface="맑은 고딕"/>
+                <a:ea typeface="맑은 고딕"/>
+                <a:cs typeface="맑은 고딕"/>
               </a:rPr>
               <a:t>실시간 반영 확인 실습</a:t>
             </a:r>
@@ -7353,6 +7437,8 @@
                   <a:srgbClr val="FFFFFF"/>
                 </a:solidFill>
                 <a:latin typeface="맑은 고딕"/>
+                <a:ea typeface="맑은 고딕"/>
+                <a:cs typeface="맑은 고딕"/>
               </a:rPr>
               <a:t>3</a:t>
             </a:r>
@@ -7436,6 +7522,8 @@
                   <a:srgbClr val="14213D"/>
                 </a:solidFill>
                 <a:latin typeface="맑은 고딕"/>
+                <a:ea typeface="맑은 고딕"/>
+                <a:cs typeface="맑은 고딕"/>
               </a:rPr>
               <a:t>VM 안내</a:t>
             </a:r>
@@ -7475,6 +7563,8 @@
                   <a:srgbClr val="222733"/>
                 </a:solidFill>
                 <a:latin typeface="맑은 고딕"/>
+                <a:ea typeface="맑은 고딕"/>
+                <a:cs typeface="맑은 고딕"/>
               </a:rPr>
               <a:t>VM 과제 제출</a:t>
             </a:r>
@@ -7554,6 +7644,8 @@
                   <a:srgbClr val="FFFFFF"/>
                 </a:solidFill>
                 <a:latin typeface="맑은 고딕"/>
+                <a:ea typeface="맑은 고딕"/>
+                <a:cs typeface="맑은 고딕"/>
               </a:rPr>
               <a:t>4</a:t>
             </a:r>
@@ -7637,6 +7729,8 @@
                   <a:srgbClr val="14213D"/>
                 </a:solidFill>
                 <a:latin typeface="맑은 고딕"/>
+                <a:ea typeface="맑은 고딕"/>
+                <a:cs typeface="맑은 고딕"/>
               </a:rPr>
               <a:t>결과 제출</a:t>
             </a:r>
@@ -7676,6 +7770,8 @@
                   <a:srgbClr val="222733"/>
                 </a:solidFill>
                 <a:latin typeface="맑은 고딕"/>
+                <a:ea typeface="맑은 고딕"/>
+                <a:cs typeface="맑은 고딕"/>
               </a:rPr>
               <a:t>체크리스트 제출</a:t>
             </a:r>
@@ -7711,6 +7807,8 @@
                   <a:srgbClr val="5B6373"/>
                 </a:solidFill>
                 <a:latin typeface="맑은 고딕"/>
+                <a:ea typeface="맑은 고딕"/>
+                <a:cs typeface="맑은 고딕"/>
               </a:rPr>
               <a:t>클라우드인프라관리  ·  2주차 3차시</a:t>
             </a:r>
@@ -7746,6 +7844,8 @@
                   <a:srgbClr val="5B6373"/>
                 </a:solidFill>
                 <a:latin typeface="맑은 고딕"/>
+                <a:ea typeface="맑은 고딕"/>
+                <a:cs typeface="맑은 고딕"/>
               </a:rPr>
               <a:t>03 / 12</a:t>
             </a:r>
@@ -7949,6 +8049,8 @@
                   <a:srgbClr val="14213D"/>
                 </a:solidFill>
                 <a:latin typeface="맑은 고딕"/>
+                <a:ea typeface="맑은 고딕"/>
+                <a:cs typeface="맑은 고딕"/>
               </a:rPr>
               <a:t>PART 01</a:t>
             </a:r>
@@ -7984,6 +8086,8 @@
                   <a:srgbClr val="FFFFFF"/>
                 </a:solidFill>
                 <a:latin typeface="맑은 고딕"/>
+                <a:ea typeface="맑은 고딕"/>
+                <a:cs typeface="맑은 고딕"/>
               </a:rPr>
               <a:t>데이터 영속성, 눈으로 확인하기</a:t>
             </a:r>
@@ -8019,6 +8123,8 @@
                   <a:srgbClr val="C9D3E6"/>
                 </a:solidFill>
                 <a:latin typeface="맑은 고딕"/>
+                <a:ea typeface="맑은 고딕"/>
+                <a:cs typeface="맑은 고딕"/>
               </a:rPr>
               <a:t>HTML 수정 → 실시간 반영</a:t>
             </a:r>
@@ -8178,6 +8284,8 @@
                   <a:srgbClr val="14213D"/>
                 </a:solidFill>
                 <a:latin typeface="맑은 고딕"/>
+                <a:ea typeface="맑은 고딕"/>
+                <a:cs typeface="맑은 고딕"/>
               </a:rPr>
               <a:t>01</a:t>
             </a:r>
@@ -8213,6 +8321,8 @@
                   <a:srgbClr val="14B8A6"/>
                 </a:solidFill>
                 <a:latin typeface="맑은 고딕"/>
+                <a:ea typeface="맑은 고딕"/>
+                <a:cs typeface="맑은 고딕"/>
               </a:rPr>
               <a:t>PART 1 · 데이터 영속성 확인</a:t>
             </a:r>
@@ -8248,6 +8358,8 @@
                   <a:srgbClr val="FFFFFF"/>
                 </a:solidFill>
                 <a:latin typeface="맑은 고딕"/>
+                <a:ea typeface="맑은 고딕"/>
+                <a:cs typeface="맑은 고딕"/>
               </a:rPr>
               <a:t>Bind Mount의 진짜 힘</a:t>
             </a:r>
@@ -8287,6 +8399,8 @@
                   <a:srgbClr val="0D9488"/>
                 </a:solidFill>
                 <a:latin typeface="맑은 고딕"/>
+                <a:ea typeface="맑은 고딕"/>
+                <a:cs typeface="맑은 고딕"/>
               </a:rPr>
               <a:t>●  </a:t>
             </a:r>
@@ -8296,6 +8410,8 @@
                   <a:srgbClr val="222733"/>
                 </a:solidFill>
                 <a:latin typeface="맑은 고딕"/>
+                <a:ea typeface="맑은 고딕"/>
+                <a:cs typeface="맑은 고딕"/>
               </a:rPr>
               <a:t>지난 시간 webvol 컨테이너는 계속 실행 중</a:t>
             </a:r>
@@ -8312,6 +8428,8 @@
                   <a:srgbClr val="0D9488"/>
                 </a:solidFill>
                 <a:latin typeface="맑은 고딕"/>
+                <a:ea typeface="맑은 고딕"/>
+                <a:cs typeface="맑은 고딕"/>
               </a:rPr>
               <a:t>●  </a:t>
             </a:r>
@@ -8321,6 +8439,8 @@
                   <a:srgbClr val="222733"/>
                 </a:solidFill>
                 <a:latin typeface="맑은 고딕"/>
+                <a:ea typeface="맑은 고딕"/>
+                <a:cs typeface="맑은 고딕"/>
               </a:rPr>
               <a:t>VM의 ~/html/index.html 파일만 새로 덮어쓰면</a:t>
             </a:r>
@@ -8337,6 +8457,8 @@
                   <a:srgbClr val="0D9488"/>
                 </a:solidFill>
                 <a:latin typeface="맑은 고딕"/>
+                <a:ea typeface="맑은 고딕"/>
+                <a:cs typeface="맑은 고딕"/>
               </a:rPr>
               <a:t>●  </a:t>
             </a:r>
@@ -8346,6 +8468,8 @@
                   <a:srgbClr val="222733"/>
                 </a:solidFill>
                 <a:latin typeface="맑은 고딕"/>
+                <a:ea typeface="맑은 고딕"/>
+                <a:cs typeface="맑은 고딕"/>
               </a:rPr>
               <a:t>컨테이너를 재시작하지 않아도 웹 화면이 즉시 바뀐다</a:t>
             </a:r>
@@ -8425,6 +8549,8 @@
                   <a:srgbClr val="FFFFFF"/>
                 </a:solidFill>
                 <a:latin typeface="맑은 고딕"/>
+                <a:ea typeface="맑은 고딕"/>
+                <a:cs typeface="맑은 고딕"/>
               </a:rPr>
               <a:t>🔎  왜 즉시 반영될까</a:t>
             </a:r>
@@ -8460,6 +8586,8 @@
                   <a:srgbClr val="FFFFFF"/>
                 </a:solidFill>
                 <a:latin typeface="맑은 고딕"/>
+                <a:ea typeface="맑은 고딕"/>
+                <a:cs typeface="맑은 고딕"/>
               </a:rPr>
               <a:t>Bind Mount는 '복사'가 아니라 '연결'이기 때문 — 같은 파일을 컨테이너와 VM이 함께 보고 있음</a:t>
             </a:r>
@@ -8495,6 +8623,8 @@
                   <a:srgbClr val="5B6373"/>
                 </a:solidFill>
                 <a:latin typeface="맑은 고딕"/>
+                <a:ea typeface="맑은 고딕"/>
+                <a:cs typeface="맑은 고딕"/>
               </a:rPr>
               <a:t>클라우드인프라관리  ·  2주차 3차시</a:t>
             </a:r>
@@ -8530,6 +8660,8 @@
                   <a:srgbClr val="5B6373"/>
                 </a:solidFill>
                 <a:latin typeface="맑은 고딕"/>
+                <a:ea typeface="맑은 고딕"/>
+                <a:cs typeface="맑은 고딕"/>
               </a:rPr>
               <a:t>05 / 12</a:t>
             </a:r>
@@ -8733,6 +8865,8 @@
                   <a:srgbClr val="14213D"/>
                 </a:solidFill>
                 <a:latin typeface="맑은 고딕"/>
+                <a:ea typeface="맑은 고딕"/>
+                <a:cs typeface="맑은 고딕"/>
               </a:rPr>
               <a:t>PART 02</a:t>
             </a:r>
@@ -8768,6 +8902,8 @@
                   <a:srgbClr val="FFFFFF"/>
                 </a:solidFill>
                 <a:latin typeface="맑은 고딕"/>
+                <a:ea typeface="맑은 고딕"/>
+                <a:cs typeface="맑은 고딕"/>
               </a:rPr>
               <a:t>Named Volume</a:t>
             </a:r>
@@ -8803,6 +8939,8 @@
                   <a:srgbClr val="C9D3E6"/>
                 </a:solidFill>
                 <a:latin typeface="맑은 고딕"/>
+                <a:ea typeface="맑은 고딕"/>
+                <a:cs typeface="맑은 고딕"/>
               </a:rPr>
               <a:t>Docker가 직접 관리하는 저장 공간</a:t>
             </a:r>
@@ -8962,6 +9100,8 @@
                   <a:srgbClr val="14213D"/>
                 </a:solidFill>
                 <a:latin typeface="맑은 고딕"/>
+                <a:ea typeface="맑은 고딕"/>
+                <a:cs typeface="맑은 고딕"/>
               </a:rPr>
               <a:t>02</a:t>
             </a:r>
@@ -8997,6 +9137,8 @@
                   <a:srgbClr val="14B8A6"/>
                 </a:solidFill>
                 <a:latin typeface="맑은 고딕"/>
+                <a:ea typeface="맑은 고딕"/>
+                <a:cs typeface="맑은 고딕"/>
               </a:rPr>
               <a:t>PART 2 · Named Volume</a:t>
             </a:r>
@@ -9032,6 +9174,8 @@
                   <a:srgbClr val="FFFFFF"/>
                 </a:solidFill>
                 <a:latin typeface="맑은 고딕"/>
+                <a:ea typeface="맑은 고딕"/>
+                <a:cs typeface="맑은 고딕"/>
               </a:rPr>
               <a:t>Named Volume이란?</a:t>
             </a:r>
@@ -9071,6 +9215,8 @@
                   <a:srgbClr val="0D9488"/>
                 </a:solidFill>
                 <a:latin typeface="맑은 고딕"/>
+                <a:ea typeface="맑은 고딕"/>
+                <a:cs typeface="맑은 고딕"/>
               </a:rPr>
               <a:t>●  </a:t>
             </a:r>
@@ -9080,6 +9226,8 @@
                   <a:srgbClr val="222733"/>
                 </a:solidFill>
                 <a:latin typeface="맑은 고딕"/>
+                <a:ea typeface="맑은 고딕"/>
+                <a:cs typeface="맑은 고딕"/>
               </a:rPr>
               <a:t>docker volume create로 만드는, Docker가 직접 관리하는 저장 공간</a:t>
             </a:r>
@@ -9096,6 +9244,8 @@
                   <a:srgbClr val="0D9488"/>
                 </a:solidFill>
                 <a:latin typeface="맑은 고딕"/>
+                <a:ea typeface="맑은 고딕"/>
+                <a:cs typeface="맑은 고딕"/>
               </a:rPr>
               <a:t>●  </a:t>
             </a:r>
@@ -9105,6 +9255,8 @@
                   <a:srgbClr val="222733"/>
                 </a:solidFill>
                 <a:latin typeface="맑은 고딕"/>
+                <a:ea typeface="맑은 고딕"/>
+                <a:cs typeface="맑은 고딕"/>
               </a:rPr>
               <a:t>VM의 어느 경로인지 신경 쓸 필요 없이 이름으로만 다룸</a:t>
             </a:r>
@@ -9121,6 +9273,8 @@
                   <a:srgbClr val="0D9488"/>
                 </a:solidFill>
                 <a:latin typeface="맑은 고딕"/>
+                <a:ea typeface="맑은 고딕"/>
+                <a:cs typeface="맑은 고딕"/>
               </a:rPr>
               <a:t>●  </a:t>
             </a:r>
@@ -9130,6 +9284,8 @@
                   <a:srgbClr val="222733"/>
                 </a:solidFill>
                 <a:latin typeface="맑은 고딕"/>
+                <a:ea typeface="맑은 고딕"/>
+                <a:cs typeface="맑은 고딕"/>
               </a:rPr>
               <a:t>docker run -v {볼륨이름}:{컨테이너 경로} 형태로 사용</a:t>
             </a:r>
@@ -9165,6 +9321,8 @@
                   <a:srgbClr val="14213D"/>
                 </a:solidFill>
                 <a:latin typeface="맑은 고딕"/>
+                <a:ea typeface="맑은 고딕"/>
+                <a:cs typeface="맑은 고딕"/>
               </a:rPr>
               <a:t>연결 구조</a:t>
             </a:r>
@@ -9244,6 +9402,8 @@
                   <a:srgbClr val="FFFFFF"/>
                 </a:solidFill>
                 <a:latin typeface="맑은 고딕"/>
+                <a:ea typeface="맑은 고딕"/>
+                <a:cs typeface="맑은 고딕"/>
               </a:rPr>
               <a:t>VM: Docker가 내부적으로 관리하는 영역</a:t>
             </a:r>
@@ -9323,6 +9483,8 @@
                   <a:srgbClr val="FFFFFF"/>
                 </a:solidFill>
                 <a:latin typeface="맑은 고딕"/>
+                <a:ea typeface="맑은 고딕"/>
+                <a:cs typeface="맑은 고딕"/>
               </a:rPr>
               <a:t>↕  (Named Volume)</a:t>
             </a:r>
@@ -9402,6 +9564,8 @@
                   <a:srgbClr val="FFFFFF"/>
                 </a:solidFill>
                 <a:latin typeface="맑은 고딕"/>
+                <a:ea typeface="맑은 고딕"/>
+                <a:cs typeface="맑은 고딕"/>
               </a:rPr>
               <a:t>컨테이너: /usr/share/nginx/html</a:t>
             </a:r>
@@ -9437,6 +9601,8 @@
                   <a:srgbClr val="5B6373"/>
                 </a:solidFill>
                 <a:latin typeface="맑은 고딕"/>
+                <a:ea typeface="맑은 고딕"/>
+                <a:cs typeface="맑은 고딕"/>
               </a:rPr>
               <a:t>클라우드인프라관리  ·  2주차 3차시</a:t>
             </a:r>
@@ -9472,6 +9638,8 @@
                   <a:srgbClr val="5B6373"/>
                 </a:solidFill>
                 <a:latin typeface="맑은 고딕"/>
+                <a:ea typeface="맑은 고딕"/>
+                <a:cs typeface="맑은 고딕"/>
               </a:rPr>
               <a:t>07 / 12</a:t>
             </a:r>
@@ -9675,6 +9843,8 @@
                   <a:srgbClr val="14213D"/>
                 </a:solidFill>
                 <a:latin typeface="맑은 고딕"/>
+                <a:ea typeface="맑은 고딕"/>
+                <a:cs typeface="맑은 고딕"/>
               </a:rPr>
               <a:t>02</a:t>
             </a:r>
@@ -9710,6 +9880,8 @@
                   <a:srgbClr val="14B8A6"/>
                 </a:solidFill>
                 <a:latin typeface="맑은 고딕"/>
+                <a:ea typeface="맑은 고딕"/>
+                <a:cs typeface="맑은 고딕"/>
               </a:rPr>
               <a:t>PART 2 · Named Volume</a:t>
             </a:r>
@@ -9745,6 +9917,8 @@
                   <a:srgbClr val="FFFFFF"/>
                 </a:solidFill>
                 <a:latin typeface="맑은 고딕"/>
+                <a:ea typeface="맑은 고딕"/>
+                <a:cs typeface="맑은 고딕"/>
               </a:rPr>
               <a:t>Bind Mount vs Named Volume</a:t>
             </a:r>
@@ -9824,6 +9998,8 @@
                   <a:srgbClr val="FFFFFF"/>
                 </a:solidFill>
                 <a:latin typeface="맑은 고딕"/>
+                <a:ea typeface="맑은 고딕"/>
+                <a:cs typeface="맑은 고딕"/>
               </a:rPr>
               <a:t>구분</a:t>
             </a:r>
@@ -9903,6 +10079,8 @@
                   <a:srgbClr val="FFFFFF"/>
                 </a:solidFill>
                 <a:latin typeface="맑은 고딕"/>
+                <a:ea typeface="맑은 고딕"/>
+                <a:cs typeface="맑은 고딕"/>
               </a:rPr>
               <a:t>Bind Mount</a:t>
             </a:r>
@@ -9982,6 +10160,8 @@
                   <a:srgbClr val="FFFFFF"/>
                 </a:solidFill>
                 <a:latin typeface="맑은 고딕"/>
+                <a:ea typeface="맑은 고딕"/>
+                <a:cs typeface="맑은 고딕"/>
               </a:rPr>
               <a:t>Named Volume</a:t>
             </a:r>
@@ -10061,6 +10241,8 @@
                   <a:srgbClr val="14213D"/>
                 </a:solidFill>
                 <a:latin typeface="맑은 고딕"/>
+                <a:ea typeface="맑은 고딕"/>
+                <a:cs typeface="맑은 고딕"/>
               </a:rPr>
               <a:t>경로 관리</a:t>
             </a:r>
@@ -10140,6 +10322,8 @@
                   <a:srgbClr val="222733"/>
                 </a:solidFill>
                 <a:latin typeface="맑은 고딕"/>
+                <a:ea typeface="맑은 고딕"/>
+                <a:cs typeface="맑은 고딕"/>
               </a:rPr>
               <a:t>내가 직접 VM 경로 지정</a:t>
             </a:r>
@@ -10219,6 +10403,8 @@
                   <a:srgbClr val="222733"/>
                 </a:solidFill>
                 <a:latin typeface="맑은 고딕"/>
+                <a:ea typeface="맑은 고딕"/>
+                <a:cs typeface="맑은 고딕"/>
               </a:rPr>
               <a:t>Docker가 알아서 관리</a:t>
             </a:r>
@@ -10298,6 +10484,8 @@
                   <a:srgbClr val="14213D"/>
                 </a:solidFill>
                 <a:latin typeface="맑은 고딕"/>
+                <a:ea typeface="맑은 고딕"/>
+                <a:cs typeface="맑은 고딕"/>
               </a:rPr>
               <a:t>용도</a:t>
             </a:r>
@@ -10377,6 +10565,8 @@
                   <a:srgbClr val="222733"/>
                 </a:solidFill>
                 <a:latin typeface="맑은 고딕"/>
+                <a:ea typeface="맑은 고딕"/>
+                <a:cs typeface="맑은 고딕"/>
               </a:rPr>
               <a:t>VM의 특정 파일을 직접 다룰 때 (예: 소스코드)</a:t>
             </a:r>
@@ -10456,6 +10646,8 @@
                   <a:srgbClr val="222733"/>
                 </a:solidFill>
                 <a:latin typeface="맑은 고딕"/>
+                <a:ea typeface="맑은 고딕"/>
+                <a:cs typeface="맑은 고딕"/>
               </a:rPr>
               <a:t>컨테이너 전용 데이터 저장 (예: DB)</a:t>
             </a:r>
@@ -10535,6 +10727,8 @@
                   <a:srgbClr val="14213D"/>
                 </a:solidFill>
                 <a:latin typeface="맑은 고딕"/>
+                <a:ea typeface="맑은 고딕"/>
+                <a:cs typeface="맑은 고딕"/>
               </a:rPr>
               <a:t>이식성</a:t>
             </a:r>
@@ -10614,6 +10808,8 @@
                   <a:srgbClr val="222733"/>
                 </a:solidFill>
                 <a:latin typeface="맑은 고딕"/>
+                <a:ea typeface="맑은 고딕"/>
+                <a:cs typeface="맑은 고딕"/>
               </a:rPr>
               <a:t>VM 경로 구조에 의존적</a:t>
             </a:r>
@@ -10693,6 +10889,8 @@
                   <a:srgbClr val="222733"/>
                 </a:solidFill>
                 <a:latin typeface="맑은 고딕"/>
+                <a:ea typeface="맑은 고딕"/>
+                <a:cs typeface="맑은 고딕"/>
               </a:rPr>
               <a:t>docker volume 명령으로 백업·이동 용이</a:t>
             </a:r>
@@ -10772,6 +10970,8 @@
                   <a:srgbClr val="14213D"/>
                 </a:solidFill>
                 <a:latin typeface="맑은 고딕"/>
+                <a:ea typeface="맑은 고딕"/>
+                <a:cs typeface="맑은 고딕"/>
               </a:rPr>
               <a:t>사용법</a:t>
             </a:r>
@@ -10851,6 +11051,8 @@
                   <a:srgbClr val="222733"/>
                 </a:solidFill>
                 <a:latin typeface="맑은 고딕"/>
+                <a:ea typeface="맑은 고딕"/>
+                <a:cs typeface="맑은 고딕"/>
               </a:rPr>
               <a:t>-v ~/html:/path</a:t>
             </a:r>
@@ -10930,6 +11132,8 @@
                   <a:srgbClr val="222733"/>
                 </a:solidFill>
                 <a:latin typeface="맑은 고딕"/>
+                <a:ea typeface="맑은 고딕"/>
+                <a:cs typeface="맑은 고딕"/>
               </a:rPr>
               <a:t>-v myvolume:/path</a:t>
             </a:r>
@@ -10965,6 +11169,8 @@
                   <a:srgbClr val="5B6373"/>
                 </a:solidFill>
                 <a:latin typeface="맑은 고딕"/>
+                <a:ea typeface="맑은 고딕"/>
+                <a:cs typeface="맑은 고딕"/>
               </a:rPr>
               <a:t>클라우드인프라관리  ·  2주차 3차시</a:t>
             </a:r>
@@ -11000,6 +11206,8 @@
                   <a:srgbClr val="5B6373"/>
                 </a:solidFill>
                 <a:latin typeface="맑은 고딕"/>
+                <a:ea typeface="맑은 고딕"/>
+                <a:cs typeface="맑은 고딕"/>
               </a:rPr>
               <a:t>08 / 12</a:t>
             </a:r>
@@ -11203,6 +11411,8 @@
                   <a:srgbClr val="14213D"/>
                 </a:solidFill>
                 <a:latin typeface="맑은 고딕"/>
+                <a:ea typeface="맑은 고딕"/>
+                <a:cs typeface="맑은 고딕"/>
               </a:rPr>
               <a:t>03</a:t>
             </a:r>
@@ -11238,6 +11448,8 @@
                   <a:srgbClr val="14B8A6"/>
                 </a:solidFill>
                 <a:latin typeface="맑은 고딕"/>
+                <a:ea typeface="맑은 고딕"/>
+                <a:cs typeface="맑은 고딕"/>
               </a:rPr>
               <a:t>실습 안내</a:t>
             </a:r>
@@ -11273,6 +11485,8 @@
                   <a:srgbClr val="FFFFFF"/>
                 </a:solidFill>
                 <a:latin typeface="맑은 고딕"/>
+                <a:ea typeface="맑은 고딕"/>
+                <a:cs typeface="맑은 고딕"/>
               </a:rPr>
               <a:t>Killercoda — 실시간 반영 + Named Volume</a:t>
             </a:r>
@@ -11312,6 +11526,8 @@
                   <a:srgbClr val="0D9488"/>
                 </a:solidFill>
                 <a:latin typeface="맑은 고딕"/>
+                <a:ea typeface="맑은 고딕"/>
+                <a:cs typeface="맑은 고딕"/>
               </a:rPr>
               <a:t>●  </a:t>
             </a:r>
@@ -11321,6 +11537,8 @@
                   <a:srgbClr val="222733"/>
                 </a:solidFill>
                 <a:latin typeface="맑은 고딕"/>
+                <a:ea typeface="맑은 고딕"/>
+                <a:cs typeface="맑은 고딕"/>
               </a:rPr>
               <a:t>echo '&lt;h1&gt;Updated!&lt;/h1&gt;' &gt; ~/html/index.html</a:t>
             </a:r>
@@ -11337,6 +11555,8 @@
                   <a:srgbClr val="0D9488"/>
                 </a:solidFill>
                 <a:latin typeface="맑은 고딕"/>
+                <a:ea typeface="맑은 고딕"/>
+                <a:cs typeface="맑은 고딕"/>
               </a:rPr>
               <a:t>●  </a:t>
             </a:r>
@@ -11346,6 +11566,8 @@
                   <a:srgbClr val="222733"/>
                 </a:solidFill>
                 <a:latin typeface="맑은 고딕"/>
+                <a:ea typeface="맑은 고딕"/>
+                <a:cs typeface="맑은 고딕"/>
               </a:rPr>
               <a:t>curl localhost:8080  →  "Updated!"로 바뀐 것 확인 (컨테이너 재시작 없이!)</a:t>
             </a:r>
@@ -11362,6 +11584,8 @@
                   <a:srgbClr val="0D9488"/>
                 </a:solidFill>
                 <a:latin typeface="맑은 고딕"/>
+                <a:ea typeface="맑은 고딕"/>
+                <a:cs typeface="맑은 고딕"/>
               </a:rPr>
               <a:t>●  </a:t>
             </a:r>
@@ -11371,6 +11595,8 @@
                   <a:srgbClr val="222733"/>
                 </a:solidFill>
                 <a:latin typeface="맑은 고딕"/>
+                <a:ea typeface="맑은 고딕"/>
+                <a:cs typeface="맑은 고딕"/>
               </a:rPr>
               <a:t>docker volume create mydata</a:t>
             </a:r>
@@ -11387,6 +11613,8 @@
                   <a:srgbClr val="0D9488"/>
                 </a:solidFill>
                 <a:latin typeface="맑은 고딕"/>
+                <a:ea typeface="맑은 고딕"/>
+                <a:cs typeface="맑은 고딕"/>
               </a:rPr>
               <a:t>●  </a:t>
             </a:r>
@@ -11396,6 +11624,8 @@
                   <a:srgbClr val="222733"/>
                 </a:solidFill>
                 <a:latin typeface="맑은 고딕"/>
+                <a:ea typeface="맑은 고딕"/>
+                <a:cs typeface="맑은 고딕"/>
               </a:rPr>
               <a:t>docker run -d -v mydata:/usr/share/nginx/html --name webvol2 nginx</a:t>
             </a:r>
@@ -11431,6 +11661,8 @@
                   <a:srgbClr val="5B6373"/>
                 </a:solidFill>
                 <a:latin typeface="맑은 고딕"/>
+                <a:ea typeface="맑은 고딕"/>
+                <a:cs typeface="맑은 고딕"/>
               </a:rPr>
               <a:t>클라우드인프라관리  ·  2주차 3차시</a:t>
             </a:r>
@@ -11466,6 +11698,8 @@
                   <a:srgbClr val="5B6373"/>
                 </a:solidFill>
                 <a:latin typeface="맑은 고딕"/>
+                <a:ea typeface="맑은 고딕"/>
+                <a:cs typeface="맑은 고딕"/>
               </a:rPr>
               <a:t>09 / 12</a:t>
             </a:r>

--- a/class/cloud_infra_mgmt/02주차_Docker기초/01_강의자료/3차시_NamedVolume비교와영속성심화.pptx
+++ b/class/cloud_infra_mgmt/02주차_Docker기초/01_강의자료/3차시_NamedVolume비교와영속성심화.pptx
@@ -5405,7 +5405,7 @@
                 <a:ea typeface="맑은 고딕"/>
                 <a:cs typeface="맑은 고딕"/>
               </a:rPr>
-              <a:t>10 / 12</a:t>
+              <a:t>10 / 13</a:t>
             </a:r>
           </a:p>
         </p:txBody>
@@ -6589,7 +6589,7 @@
                 <a:ea typeface="맑은 고딕"/>
                 <a:cs typeface="맑은 고딕"/>
               </a:rPr>
-              <a:t>02 / 12</a:t>
+              <a:t>02 / 13</a:t>
             </a:r>
           </a:p>
         </p:txBody>
@@ -7847,7 +7847,7 @@
                 <a:ea typeface="맑은 고딕"/>
                 <a:cs typeface="맑은 고딕"/>
               </a:rPr>
-              <a:t>03 / 12</a:t>
+              <a:t>03 / 13</a:t>
             </a:r>
           </a:p>
         </p:txBody>
@@ -8663,7 +8663,7 @@
                 <a:ea typeface="맑은 고딕"/>
                 <a:cs typeface="맑은 고딕"/>
               </a:rPr>
-              <a:t>05 / 12</a:t>
+              <a:t>05 / 13</a:t>
             </a:r>
           </a:p>
         </p:txBody>
@@ -9641,7 +9641,7 @@
                 <a:ea typeface="맑은 고딕"/>
                 <a:cs typeface="맑은 고딕"/>
               </a:rPr>
-              <a:t>07 / 12</a:t>
+              <a:t>07 / 13</a:t>
             </a:r>
           </a:p>
         </p:txBody>
@@ -11209,7 +11209,7 @@
                 <a:ea typeface="맑은 고딕"/>
                 <a:cs typeface="맑은 고딕"/>
               </a:rPr>
-              <a:t>08 / 12</a:t>
+              <a:t>08 / 13</a:t>
             </a:r>
           </a:p>
         </p:txBody>
@@ -11701,7 +11701,7 @@
                 <a:ea typeface="맑은 고딕"/>
                 <a:cs typeface="맑은 고딕"/>
               </a:rPr>
-              <a:t>09 / 12</a:t>
+              <a:t>09 / 13</a:t>
             </a:r>
           </a:p>
         </p:txBody>
